--- a/curriculum/M01/W01/L03/slides-2.pptx
+++ b/curriculum/M01/W01/L03/slides-2.pptx
@@ -15034,7 +15034,7 @@
                 <a:ea typeface="Malgun Gothic"/>
                 <a:cs typeface="Malgun Gothic"/>
               </a:rPr>
-              <a:t>M01-W01-L01 순환계 요약 — hepatic portal system, 모세혈관 교환</a:t>
+              <a:t>M01-W01-L01 순환계 요약: 심장·혈관·혈류와 항상성 — hepatic portal system, 모세혈관 교환</a:t>
             </a:r>
           </a:p>
           <a:p>
@@ -15063,7 +15063,7 @@
                 <a:ea typeface="Malgun Gothic"/>
                 <a:cs typeface="Malgun Gothic"/>
               </a:rPr>
-              <a:t>M01-W01-L02 호흡계 요약 — 확산과 분압, 표면적과 교환 효율</a:t>
+              <a:t>M01-W01-L02 호흡계 요약: 환기·가스교환·산소 운반 — 확산과 분압, 표면적과 교환 효율</a:t>
             </a:r>
           </a:p>
           <a:p>
